--- a/presentation/slides.pptx
+++ b/presentation/slides.pptx
@@ -3075,7 +3075,7 @@
                 <a:ea typeface="Inter Bold" pitchFamily="34" charset="-122"/>
                 <a:cs typeface="Inter Bold" pitchFamily="34" charset="-120"/>
               </a:rPr>
-              <a:t>IBM Bob — AI Eco Mentor</a:t>
+              <a:t>AI Eco Mentor</a:t>
             </a:r>
             <a:endParaRPr lang="en-US" sz="1850" dirty="0"/>
           </a:p>
@@ -6210,7 +6210,7 @@
         </p:nvSpPr>
         <p:spPr>
           <a:xfrm>
-            <a:off x="7946814" y="2318665"/>
+            <a:off x="8103893" y="1561126"/>
             <a:ext cx="4088107" cy="276920"/>
           </a:xfrm>
           <a:prstGeom prst="rect">
@@ -6266,7 +6266,7 @@
         </p:blipFill>
         <p:spPr>
           <a:xfrm>
-            <a:off x="7448364" y="2270136"/>
+            <a:off x="7592410" y="1494185"/>
             <a:ext cx="354401" cy="354409"/>
           </a:xfrm>
           <a:prstGeom prst="rect">
@@ -6282,7 +6282,7 @@
         </p:nvSpPr>
         <p:spPr>
           <a:xfrm>
-            <a:off x="7946814" y="2861586"/>
+            <a:off x="8103893" y="2004046"/>
             <a:ext cx="3526047" cy="276920"/>
           </a:xfrm>
           <a:prstGeom prst="rect">
@@ -6324,7 +6324,7 @@
         </p:nvSpPr>
         <p:spPr>
           <a:xfrm>
-            <a:off x="7946813" y="3359268"/>
+            <a:off x="8103893" y="2280966"/>
             <a:ext cx="3526047" cy="276920"/>
           </a:xfrm>
           <a:prstGeom prst="rect">
@@ -6366,7 +6366,7 @@
         </p:nvSpPr>
         <p:spPr>
           <a:xfrm>
-            <a:off x="7946812" y="3866306"/>
+            <a:off x="8103892" y="2557816"/>
             <a:ext cx="3526047" cy="276920"/>
           </a:xfrm>
           <a:prstGeom prst="rect">
@@ -6408,7 +6408,7 @@
         </p:nvSpPr>
         <p:spPr>
           <a:xfrm>
-            <a:off x="7946811" y="4363988"/>
+            <a:off x="8103891" y="2822851"/>
             <a:ext cx="3526047" cy="276920"/>
           </a:xfrm>
           <a:prstGeom prst="rect">
@@ -6439,6 +6439,159 @@
               <a:t>Chandni Kothari</a:t>
             </a:r>
             <a:endParaRPr lang="en-US" sz="1700" dirty="0"/>
+          </a:p>
+        </p:txBody>
+      </p:sp>
+      <p:sp>
+        <p:nvSpPr>
+          <p:cNvPr id="20" name="Shape 4"/>
+          <p:cNvSpPr/>
+          <p:nvPr/>
+        </p:nvSpPr>
+        <p:spPr>
+          <a:xfrm>
+            <a:off x="7700324" y="3762433"/>
+            <a:ext cx="4088107" cy="19050"/>
+          </a:xfrm>
+          <a:prstGeom prst="roundRect">
+            <a:avLst>
+              <a:gd name="adj" fmla="val 49999"/>
+            </a:avLst>
+          </a:prstGeom>
+          <a:solidFill>
+            <a:srgbClr val="272525">
+              <a:alpha val="50000"/>
+            </a:srgbClr>
+          </a:solidFill>
+          <a:ln/>
+        </p:spPr>
+      </p:sp>
+      <p:sp>
+        <p:nvSpPr>
+          <p:cNvPr id="21" name="Text 14"/>
+          <p:cNvSpPr/>
+          <p:nvPr/>
+        </p:nvSpPr>
+        <p:spPr>
+          <a:xfrm>
+            <a:off x="7769610" y="3946116"/>
+            <a:ext cx="4088107" cy="276920"/>
+          </a:xfrm>
+          <a:prstGeom prst="rect">
+            <a:avLst/>
+          </a:prstGeom>
+          <a:noFill/>
+          <a:ln/>
+        </p:spPr>
+        <p:txBody>
+          <a:bodyPr wrap="none" lIns="0" tIns="0" rIns="0" bIns="0" rtlCol="0" anchor="t"/>
+          <a:lstStyle/>
+          <a:p>
+            <a:pPr marL="0" indent="0" algn="l">
+              <a:lnSpc>
+                <a:spcPct val="104000"/>
+              </a:lnSpc>
+              <a:buNone/>
+            </a:pPr>
+            <a:r>
+              <a:rPr lang="en-US" sz="1700" b="1" kern="0" spc="-52" dirty="0">
+                <a:solidFill>
+                  <a:srgbClr val="000000"/>
+                </a:solidFill>
+                <a:latin typeface="Inter Bold" pitchFamily="34" charset="0"/>
+                <a:ea typeface="Inter Bold" pitchFamily="34" charset="-122"/>
+                <a:cs typeface="Inter Bold" pitchFamily="34" charset="-120"/>
+              </a:rPr>
+              <a:t>Future Scope</a:t>
+            </a:r>
+            <a:endParaRPr lang="en-US" sz="1700" dirty="0"/>
+          </a:p>
+        </p:txBody>
+      </p:sp>
+      <p:sp>
+        <p:nvSpPr>
+          <p:cNvPr id="22" name="Text 15"/>
+          <p:cNvSpPr/>
+          <p:nvPr/>
+        </p:nvSpPr>
+        <p:spPr>
+          <a:xfrm>
+            <a:off x="7592410" y="4467806"/>
+            <a:ext cx="4088107" cy="950000"/>
+          </a:xfrm>
+          <a:prstGeom prst="rect">
+            <a:avLst/>
+          </a:prstGeom>
+          <a:noFill/>
+          <a:ln/>
+        </p:spPr>
+        <p:txBody>
+          <a:bodyPr wrap="square" lIns="0" tIns="0" rIns="0" bIns="0" rtlCol="0" anchor="t">
+            <a:normAutofit fontScale="85000" lnSpcReduction="20000"/>
+          </a:bodyPr>
+          <a:lstStyle/>
+          <a:p>
+            <a:pPr marL="274320" indent="-274320" algn="l">
+              <a:lnSpc>
+                <a:spcPct val="129000"/>
+              </a:lnSpc>
+              <a:buSzPct val="100000"/>
+              <a:buChar char="•"/>
+            </a:pPr>
+            <a:r>
+              <a:rPr lang="en-US" sz="1350" kern="0" spc="-28" dirty="0">
+                <a:solidFill>
+                  <a:srgbClr val="272525"/>
+                </a:solidFill>
+                <a:latin typeface="Inter" pitchFamily="34" charset="0"/>
+                <a:ea typeface="Inter" pitchFamily="34" charset="-122"/>
+                <a:cs typeface="Inter" pitchFamily="34" charset="-120"/>
+              </a:rPr>
+              <a:t>Offline-first mode to support low-connectivity schools</a:t>
+            </a:r>
+            <a:endParaRPr lang="en-US" sz="1350" dirty="0"/>
+          </a:p>
+          <a:p>
+            <a:pPr marL="274320" indent="-274320" algn="l">
+              <a:lnSpc>
+                <a:spcPct val="129000"/>
+              </a:lnSpc>
+              <a:buSzPct val="100000"/>
+              <a:buChar char="•"/>
+            </a:pPr>
+            <a:r>
+              <a:rPr lang="en-US" sz="1350" kern="0" spc="-28" dirty="0">
+                <a:solidFill>
+                  <a:srgbClr val="272525"/>
+                </a:solidFill>
+                <a:latin typeface="Inter" pitchFamily="34" charset="0"/>
+                <a:ea typeface="Inter" pitchFamily="34" charset="-122"/>
+                <a:cs typeface="Inter" pitchFamily="34" charset="-120"/>
+              </a:rPr>
+              <a:t>Regional language support and localized content for wider reach</a:t>
+            </a:r>
+            <a:endParaRPr lang="en-US" sz="1350" dirty="0"/>
+          </a:p>
+          <a:p>
+            <a:pPr marL="274320" indent="-274320" algn="l">
+              <a:lnSpc>
+                <a:spcPct val="129000"/>
+              </a:lnSpc>
+              <a:buSzPct val="100000"/>
+              <a:buChar char="•"/>
+            </a:pPr>
+            <a:r>
+              <a:rPr lang="en-US" sz="1350" kern="0" spc="-28" dirty="0">
+                <a:solidFill>
+                  <a:srgbClr val="272525"/>
+                </a:solidFill>
+                <a:latin typeface="Inter" pitchFamily="34" charset="0"/>
+                <a:ea typeface="Inter" pitchFamily="34" charset="-122"/>
+                <a:cs typeface="Inter" pitchFamily="34" charset="-120"/>
+              </a:rPr>
+              <a:t>ERP/LMS integration to enable large-scale institutional adoption</a:t>
+            </a:r>
+            <a:endParaRPr lang="en-US" sz="1350" dirty="0"/>
           </a:p>
         </p:txBody>
       </p:sp>
